--- a/Презентация и отчет/Razrabotka_prosteyshego_faylovogo_servera_na_yazyke_Go_v_ramkakh_uch.pptx
+++ b/Презентация и отчет/Razrabotka_prosteyshego_faylovogo_servera_na_yazyke_Go_v_ramkakh_uch.pptx
@@ -3254,30 +3254,6 @@
           <a:chExt cx="0" cy="0"/>
         </a:xfrm>
       </p:grpSpPr>
-      <p:pic>
-        <p:nvPicPr>
-          <p:cNvPr id="2" name="Picture 1" descr="image.jpg"/>
-          <p:cNvPicPr>
-            <a:picLocks noChangeAspect="1"/>
-          </p:cNvPicPr>
-          <p:nvPr/>
-        </p:nvPicPr>
-        <p:blipFill>
-          <a:blip r:embed="rId2"/>
-          <a:stretch>
-            <a:fillRect/>
-          </a:stretch>
-        </p:blipFill>
-        <p:spPr>
-          <a:xfrm>
-            <a:off x="9144000" y="0"/>
-            <a:ext cx="5486400" cy="8229600"/>
-          </a:xfrm>
-          <a:prstGeom prst="rect">
-            <a:avLst/>
-          </a:prstGeom>
-        </p:spPr>
-      </p:pic>
       <p:sp>
         <p:nvSpPr>
           <p:cNvPr id="3" name="TextBox 2"/>
@@ -3323,7 +3299,7 @@
           <p:nvPr/>
         </p:nvPicPr>
         <p:blipFill>
-          <a:blip r:embed="rId3"/>
+          <a:blip r:embed="rId2"/>
           <a:stretch>
             <a:fillRect/>
           </a:stretch>
@@ -3419,7 +3395,7 @@
           <p:nvPr/>
         </p:nvPicPr>
         <p:blipFill>
-          <a:blip r:embed="rId3"/>
+          <a:blip r:embed="rId2"/>
           <a:stretch>
             <a:fillRect/>
           </a:stretch>
@@ -3515,7 +3491,7 @@
           <p:nvPr/>
         </p:nvPicPr>
         <p:blipFill>
-          <a:blip r:embed="rId3"/>
+          <a:blip r:embed="rId2"/>
           <a:stretch>
             <a:fillRect/>
           </a:stretch>
@@ -4252,30 +4228,6 @@
           <a:chExt cx="0" cy="0"/>
         </a:xfrm>
       </p:grpSpPr>
-      <p:pic>
-        <p:nvPicPr>
-          <p:cNvPr id="2" name="Picture 1" descr="image.jpg"/>
-          <p:cNvPicPr>
-            <a:picLocks noChangeAspect="1"/>
-          </p:cNvPicPr>
-          <p:nvPr/>
-        </p:nvPicPr>
-        <p:blipFill>
-          <a:blip r:embed="rId2"/>
-          <a:stretch>
-            <a:fillRect/>
-          </a:stretch>
-        </p:blipFill>
-        <p:spPr>
-          <a:xfrm>
-            <a:off x="0" y="0"/>
-            <a:ext cx="14630400" cy="3302000"/>
-          </a:xfrm>
-          <a:prstGeom prst="rect">
-            <a:avLst/>
-          </a:prstGeom>
-        </p:spPr>
-      </p:pic>
       <p:sp>
         <p:nvSpPr>
           <p:cNvPr id="3" name="TextBox 2"/>
@@ -4321,7 +4273,7 @@
           <p:nvPr/>
         </p:nvPicPr>
         <p:blipFill>
-          <a:blip r:embed="rId3"/>
+          <a:blip r:embed="rId2"/>
           <a:stretch>
             <a:fillRect/>
           </a:stretch>
@@ -4345,7 +4297,7 @@
           <p:nvPr/>
         </p:nvPicPr>
         <p:blipFill>
-          <a:blip r:embed="rId3"/>
+          <a:blip r:embed="rId2"/>
           <a:stretch>
             <a:fillRect/>
           </a:stretch>
@@ -5263,69 +5215,6 @@
           </a:p>
         </p:txBody>
       </p:sp>
-      <p:pic>
-        <p:nvPicPr>
-          <p:cNvPr id="8" name="Picture 7" descr="image.png"/>
-          <p:cNvPicPr>
-            <a:picLocks noChangeAspect="1"/>
-          </p:cNvPicPr>
-          <p:nvPr/>
-        </p:nvPicPr>
-        <p:blipFill>
-          <a:blip r:embed="rId3"/>
-          <a:stretch>
-            <a:fillRect/>
-          </a:stretch>
-        </p:blipFill>
-        <p:spPr>
-          <a:xfrm>
-            <a:off x="6350000" y="5715000"/>
-            <a:ext cx="381000" cy="381000"/>
-          </a:xfrm>
-          <a:prstGeom prst="rect">
-            <a:avLst/>
-          </a:prstGeom>
-        </p:spPr>
-      </p:pic>
-      <p:sp>
-        <p:nvSpPr>
-          <p:cNvPr id="9" name="TextBox 8"/>
-          <p:cNvSpPr txBox="1"/>
-          <p:nvPr/>
-        </p:nvSpPr>
-        <p:spPr>
-          <a:xfrm>
-            <a:off x="6350000" y="5448300"/>
-            <a:ext cx="381000" cy="381000"/>
-          </a:xfrm>
-          <a:prstGeom prst="rect">
-            <a:avLst/>
-          </a:prstGeom>
-          <a:noFill/>
-        </p:spPr>
-        <p:txBody>
-          <a:bodyPr wrap="none" lIns="0" tIns="0" rIns="0" bIns="0" anchor="t">
-            <a:spAutoFit/>
-          </a:bodyPr>
-          <a:lstStyle/>
-          <a:p>
-            <a:endParaRPr/>
-          </a:p>
-          <a:p>
-            <a:pPr algn="ctr">
-              <a:defRPr sz="2200">
-                <a:solidFill>
-                  <a:srgbClr val="61615C"/>
-                </a:solidFill>
-                <a:latin typeface="Tomorrow"/>
-              </a:defRPr>
-            </a:pPr>
-            <a:r>
-              <a:t>3</a:t>
-            </a:r>
-          </a:p>
-        </p:txBody>
-      </p:sp>
       <p:sp>
         <p:nvSpPr>
           <p:cNvPr id="10" name="TextBox 9"/>
@@ -5466,78 +5355,6 @@
             </a:pPr>
             <a:r>
               <a:t>Проект предусматривает возможность дальнейшего расширения: добавление аутентификации, версионирования файлов или метаданных.</a:t>
-            </a:r>
-          </a:p>
-        </p:txBody>
-      </p:sp>
-      <p:sp>
-        <p:nvSpPr>
-          <p:cNvPr id="14" name="TextBox 13"/>
-          <p:cNvSpPr txBox="1"/>
-          <p:nvPr/>
-        </p:nvSpPr>
-        <p:spPr>
-          <a:xfrm>
-            <a:off x="6985000" y="5524500"/>
-            <a:ext cx="6985000" cy="381000"/>
-          </a:xfrm>
-          <a:prstGeom prst="rect">
-            <a:avLst/>
-          </a:prstGeom>
-          <a:noFill/>
-        </p:spPr>
-        <p:txBody>
-          <a:bodyPr wrap="square" anchor="t">
-            <a:spAutoFit/>
-          </a:bodyPr>
-          <a:lstStyle/>
-          <a:p>
-            <a:pPr algn="l">
-              <a:defRPr sz="2200" b="1" i="0">
-                <a:solidFill>
-                  <a:srgbClr val="61615C"/>
-                </a:solidFill>
-                <a:latin typeface="Tomorrow"/>
-              </a:defRPr>
-            </a:pPr>
-            <a:r>
-              <a:t>Безопасность (ограничения)</a:t>
-            </a:r>
-          </a:p>
-        </p:txBody>
-      </p:sp>
-      <p:sp>
-        <p:nvSpPr>
-          <p:cNvPr id="15" name="TextBox 14"/>
-          <p:cNvSpPr txBox="1"/>
-          <p:nvPr/>
-        </p:nvSpPr>
-        <p:spPr>
-          <a:xfrm>
-            <a:off x="6985000" y="5905500"/>
-            <a:ext cx="6985000" cy="1143000"/>
-          </a:xfrm>
-          <a:prstGeom prst="rect">
-            <a:avLst/>
-          </a:prstGeom>
-          <a:noFill/>
-        </p:spPr>
-        <p:txBody>
-          <a:bodyPr wrap="square" anchor="t">
-            <a:spAutoFit/>
-          </a:bodyPr>
-          <a:lstStyle/>
-          <a:p>
-            <a:pPr algn="l">
-              <a:defRPr sz="1800" b="0" i="0">
-                <a:solidFill>
-                  <a:srgbClr val="61615C"/>
-                </a:solidFill>
-                <a:latin typeface="Tomorrow"/>
-              </a:defRPr>
-            </a:pPr>
-            <a:r>
-              <a:t>Отсутствие валидации входных данных пользователей создает потенциальные уязвимости при эксплуатации в реальных условиях.</a:t>
             </a:r>
           </a:p>
         </p:txBody>
